--- a/ゲーム科1年/01_後期/ゲーム制作実習Ⅰ/バージョン管理/02_リポジトリ作成.pptx
+++ b/ゲーム科1年/01_後期/ゲーム制作実習Ⅰ/バージョン管理/02_リポジトリ作成.pptx
@@ -9,9 +9,10 @@
     <p:sldId id="257" r:id="rId3"/>
     <p:sldId id="258" r:id="rId4"/>
     <p:sldId id="259" r:id="rId5"/>
-    <p:sldId id="260" r:id="rId6"/>
-    <p:sldId id="266" r:id="rId7"/>
-    <p:sldId id="267" r:id="rId8"/>
+    <p:sldId id="268" r:id="rId6"/>
+    <p:sldId id="260" r:id="rId7"/>
+    <p:sldId id="266" r:id="rId8"/>
+    <p:sldId id="267" r:id="rId9"/>
   </p:sldIdLst>
   <p:sldSz cx="12192000" cy="6858000"/>
   <p:notesSz cx="6858000" cy="9144000"/>
@@ -265,7 +266,7 @@
           <a:p>
             <a:fld id="{E9CC885B-4903-4D54-9A93-00025F12DED9}" type="datetimeFigureOut">
               <a:rPr kumimoji="1" lang="ja-JP" altLang="en-US" smtClean="0"/>
-              <a:t>2026/1/14</a:t>
+              <a:t>2026/1/15</a:t>
             </a:fld>
             <a:endParaRPr kumimoji="1" lang="ja-JP" altLang="en-US"/>
           </a:p>
@@ -495,7 +496,7 @@
           <a:p>
             <a:fld id="{E9CC885B-4903-4D54-9A93-00025F12DED9}" type="datetimeFigureOut">
               <a:rPr kumimoji="1" lang="ja-JP" altLang="en-US" smtClean="0"/>
-              <a:t>2026/1/14</a:t>
+              <a:t>2026/1/15</a:t>
             </a:fld>
             <a:endParaRPr kumimoji="1" lang="ja-JP" altLang="en-US"/>
           </a:p>
@@ -735,7 +736,7 @@
           <a:p>
             <a:fld id="{E9CC885B-4903-4D54-9A93-00025F12DED9}" type="datetimeFigureOut">
               <a:rPr kumimoji="1" lang="ja-JP" altLang="en-US" smtClean="0"/>
-              <a:t>2026/1/14</a:t>
+              <a:t>2026/1/15</a:t>
             </a:fld>
             <a:endParaRPr kumimoji="1" lang="ja-JP" altLang="en-US"/>
           </a:p>
@@ -965,7 +966,7 @@
           <a:p>
             <a:fld id="{E9CC885B-4903-4D54-9A93-00025F12DED9}" type="datetimeFigureOut">
               <a:rPr kumimoji="1" lang="ja-JP" altLang="en-US" smtClean="0"/>
-              <a:t>2026/1/14</a:t>
+              <a:t>2026/1/15</a:t>
             </a:fld>
             <a:endParaRPr kumimoji="1" lang="ja-JP" altLang="en-US"/>
           </a:p>
@@ -1240,7 +1241,7 @@
           <a:p>
             <a:fld id="{E9CC885B-4903-4D54-9A93-00025F12DED9}" type="datetimeFigureOut">
               <a:rPr kumimoji="1" lang="ja-JP" altLang="en-US" smtClean="0"/>
-              <a:t>2026/1/14</a:t>
+              <a:t>2026/1/15</a:t>
             </a:fld>
             <a:endParaRPr kumimoji="1" lang="ja-JP" altLang="en-US"/>
           </a:p>
@@ -1569,7 +1570,7 @@
           <a:p>
             <a:fld id="{E9CC885B-4903-4D54-9A93-00025F12DED9}" type="datetimeFigureOut">
               <a:rPr kumimoji="1" lang="ja-JP" altLang="en-US" smtClean="0"/>
-              <a:t>2026/1/14</a:t>
+              <a:t>2026/1/15</a:t>
             </a:fld>
             <a:endParaRPr kumimoji="1" lang="ja-JP" altLang="en-US"/>
           </a:p>
@@ -2045,7 +2046,7 @@
           <a:p>
             <a:fld id="{E9CC885B-4903-4D54-9A93-00025F12DED9}" type="datetimeFigureOut">
               <a:rPr kumimoji="1" lang="ja-JP" altLang="en-US" smtClean="0"/>
-              <a:t>2026/1/14</a:t>
+              <a:t>2026/1/15</a:t>
             </a:fld>
             <a:endParaRPr kumimoji="1" lang="ja-JP" altLang="en-US"/>
           </a:p>
@@ -2186,7 +2187,7 @@
           <a:p>
             <a:fld id="{E9CC885B-4903-4D54-9A93-00025F12DED9}" type="datetimeFigureOut">
               <a:rPr kumimoji="1" lang="ja-JP" altLang="en-US" smtClean="0"/>
-              <a:t>2026/1/14</a:t>
+              <a:t>2026/1/15</a:t>
             </a:fld>
             <a:endParaRPr kumimoji="1" lang="ja-JP" altLang="en-US"/>
           </a:p>
@@ -2299,7 +2300,7 @@
           <a:p>
             <a:fld id="{E9CC885B-4903-4D54-9A93-00025F12DED9}" type="datetimeFigureOut">
               <a:rPr kumimoji="1" lang="ja-JP" altLang="en-US" smtClean="0"/>
-              <a:t>2026/1/14</a:t>
+              <a:t>2026/1/15</a:t>
             </a:fld>
             <a:endParaRPr kumimoji="1" lang="ja-JP" altLang="en-US"/>
           </a:p>
@@ -2642,7 +2643,7 @@
           <a:p>
             <a:fld id="{E9CC885B-4903-4D54-9A93-00025F12DED9}" type="datetimeFigureOut">
               <a:rPr kumimoji="1" lang="ja-JP" altLang="en-US" smtClean="0"/>
-              <a:t>2026/1/14</a:t>
+              <a:t>2026/1/15</a:t>
             </a:fld>
             <a:endParaRPr kumimoji="1" lang="ja-JP" altLang="en-US"/>
           </a:p>
@@ -2930,7 +2931,7 @@
           <a:p>
             <a:fld id="{E9CC885B-4903-4D54-9A93-00025F12DED9}" type="datetimeFigureOut">
               <a:rPr kumimoji="1" lang="ja-JP" altLang="en-US" smtClean="0"/>
-              <a:t>2026/1/14</a:t>
+              <a:t>2026/1/15</a:t>
             </a:fld>
             <a:endParaRPr kumimoji="1" lang="ja-JP" altLang="en-US"/>
           </a:p>
@@ -3203,7 +3204,7 @@
           <a:p>
             <a:fld id="{E9CC885B-4903-4D54-9A93-00025F12DED9}" type="datetimeFigureOut">
               <a:rPr kumimoji="1" lang="ja-JP" altLang="en-US" smtClean="0"/>
-              <a:t>2026/1/14</a:t>
+              <a:t>2026/1/15</a:t>
             </a:fld>
             <a:endParaRPr kumimoji="1" lang="ja-JP" altLang="en-US"/>
           </a:p>
@@ -3670,7 +3671,7 @@
         <p:spPr>
           <a:xfrm>
             <a:off x="567542" y="1216429"/>
-            <a:ext cx="9417963" cy="3785652"/>
+            <a:ext cx="7571303" cy="3416320"/>
           </a:xfrm>
           <a:prstGeom prst="rect">
             <a:avLst/>
@@ -3729,13 +3730,6 @@
             <a:endParaRPr lang="en-US" altLang="ja-JP" sz="2400" dirty="0"/>
           </a:p>
           <a:p>
-            <a:r>
-              <a:rPr lang="ja-JP" altLang="en-US" sz="2400" dirty="0"/>
-              <a:t>・チーム名を決めること（後で使うので変な名前にしないように）</a:t>
-            </a:r>
-            <a:endParaRPr lang="en-US" altLang="ja-JP" sz="2400" dirty="0"/>
-          </a:p>
-          <a:p>
             <a:endParaRPr lang="en-US" altLang="ja-JP" sz="2400" dirty="0"/>
           </a:p>
           <a:p>
@@ -3756,12 +3750,12 @@
               <a:t>今回は</a:t>
             </a:r>
             <a:r>
-              <a:rPr lang="en-US" altLang="ja-JP" sz="2400" b="1" dirty="0" err="1">
+              <a:rPr lang="en-US" altLang="ja-JP" sz="2400" b="1" dirty="0">
                 <a:solidFill>
                   <a:srgbClr val="FF0000"/>
                 </a:solidFill>
               </a:rPr>
-              <a:t>BitBucket</a:t>
+              <a:t>GitHub</a:t>
             </a:r>
             <a:r>
               <a:rPr lang="ja-JP" altLang="en-US" sz="2400" b="1" dirty="0">
@@ -4225,63 +4219,6 @@
       </p:sp>
       <p:sp>
         <p:nvSpPr>
-          <p:cNvPr id="14" name="正方形/長方形 13">
-            <a:extLst>
-              <a:ext uri="{FF2B5EF4-FFF2-40B4-BE49-F238E27FC236}">
-                <a16:creationId xmlns:a16="http://schemas.microsoft.com/office/drawing/2014/main" id="{188135CF-EC12-4B52-983B-494865632B94}"/>
-              </a:ext>
-            </a:extLst>
-          </p:cNvPr>
-          <p:cNvSpPr/>
-          <p:nvPr/>
-        </p:nvSpPr>
-        <p:spPr>
-          <a:xfrm>
-            <a:off x="5632602" y="2388905"/>
-            <a:ext cx="3899646" cy="448235"/>
-          </a:xfrm>
-          <a:prstGeom prst="rect">
-            <a:avLst/>
-          </a:prstGeom>
-        </p:spPr>
-        <p:style>
-          <a:lnRef idx="2">
-            <a:schemeClr val="accent2">
-              <a:shade val="50000"/>
-            </a:schemeClr>
-          </a:lnRef>
-          <a:fillRef idx="1">
-            <a:schemeClr val="accent2"/>
-          </a:fillRef>
-          <a:effectRef idx="0">
-            <a:schemeClr val="accent2"/>
-          </a:effectRef>
-          <a:fontRef idx="minor">
-            <a:schemeClr val="lt1"/>
-          </a:fontRef>
-        </p:style>
-        <p:txBody>
-          <a:bodyPr rtlCol="0" anchor="ctr"/>
-          <a:lstStyle/>
-          <a:p>
-            <a:pPr algn="ctr"/>
-            <a:r>
-              <a:rPr kumimoji="1" lang="ja-JP" altLang="en-US" dirty="0"/>
-              <a:t>ゲーム制作実習</a:t>
-            </a:r>
-            <a:r>
-              <a:rPr kumimoji="1" lang="en-US" altLang="ja-JP" dirty="0"/>
-              <a:t>Ⅰ</a:t>
-            </a:r>
-            <a:r>
-              <a:rPr kumimoji="1" lang="ja-JP" altLang="en-US" dirty="0"/>
-              <a:t>を英語にしている</a:t>
-            </a:r>
-          </a:p>
-        </p:txBody>
-      </p:sp>
-      <p:sp>
-        <p:nvSpPr>
           <p:cNvPr id="15" name="テキスト ボックス 14">
             <a:extLst>
               <a:ext uri="{FF2B5EF4-FFF2-40B4-BE49-F238E27FC236}">
@@ -4295,7 +4232,7 @@
         <p:spPr>
           <a:xfrm>
             <a:off x="567542" y="5184865"/>
-            <a:ext cx="7263527" cy="461665"/>
+            <a:ext cx="7571303" cy="461665"/>
           </a:xfrm>
           <a:prstGeom prst="rect">
             <a:avLst/>
@@ -4310,7 +4247,7 @@
           <a:p>
             <a:r>
               <a:rPr kumimoji="1" lang="ja-JP" altLang="en-US" sz="2400" dirty="0"/>
-              <a:t>今後作る場合はわかりやすい名前を付けましょう。</a:t>
+              <a:t>以後、作る場合もわかりやすい名前を付けましょう。</a:t>
             </a:r>
             <a:endParaRPr lang="en-US" altLang="ja-JP" sz="2400" dirty="0"/>
           </a:p>
@@ -4706,6 +4643,137 @@
         <p:spPr>
           <a:xfrm>
             <a:off x="567542" y="1216429"/>
+            <a:ext cx="8494633" cy="461665"/>
+          </a:xfrm>
+          <a:prstGeom prst="rect">
+            <a:avLst/>
+          </a:prstGeom>
+          <a:noFill/>
+        </p:spPr>
+        <p:txBody>
+          <a:bodyPr wrap="none" rtlCol="0">
+            <a:spAutoFit/>
+          </a:bodyPr>
+          <a:lstStyle/>
+          <a:p>
+            <a:r>
+              <a:rPr lang="ja-JP" altLang="en-US" sz="2400" dirty="0"/>
+              <a:t>リポジトリが作成され、リポジトリのページが開かれます。</a:t>
+            </a:r>
+            <a:endParaRPr lang="en-US" altLang="ja-JP" sz="2400" dirty="0"/>
+          </a:p>
+        </p:txBody>
+      </p:sp>
+      <p:pic>
+        <p:nvPicPr>
+          <p:cNvPr id="3" name="図 2">
+            <a:extLst>
+              <a:ext uri="{FF2B5EF4-FFF2-40B4-BE49-F238E27FC236}">
+                <a16:creationId xmlns:a16="http://schemas.microsoft.com/office/drawing/2014/main" id="{0F08FFA3-BDA8-4F21-A119-99FC317B258C}"/>
+              </a:ext>
+            </a:extLst>
+          </p:cNvPr>
+          <p:cNvPicPr>
+            <a:picLocks noChangeAspect="1"/>
+          </p:cNvPicPr>
+          <p:nvPr/>
+        </p:nvPicPr>
+        <p:blipFill>
+          <a:blip r:embed="rId2"/>
+          <a:stretch>
+            <a:fillRect/>
+          </a:stretch>
+        </p:blipFill>
+        <p:spPr>
+          <a:xfrm>
+            <a:off x="567542" y="1817794"/>
+            <a:ext cx="10089746" cy="4627830"/>
+          </a:xfrm>
+          <a:prstGeom prst="rect">
+            <a:avLst/>
+          </a:prstGeom>
+        </p:spPr>
+      </p:pic>
+    </p:spTree>
+    <p:extLst>
+      <p:ext uri="{BB962C8B-B14F-4D97-AF65-F5344CB8AC3E}">
+        <p14:creationId xmlns:p14="http://schemas.microsoft.com/office/powerpoint/2010/main" val="850147439"/>
+      </p:ext>
+    </p:extLst>
+  </p:cSld>
+  <p:clrMapOvr>
+    <a:masterClrMapping/>
+  </p:clrMapOvr>
+</p:sld>
+</file>
+
+<file path=ppt/slides/slide6.xml><?xml version="1.0" encoding="utf-8"?>
+<p:sld xmlns:a="http://schemas.openxmlformats.org/drawingml/2006/main" xmlns:r="http://schemas.openxmlformats.org/officeDocument/2006/relationships" xmlns:p="http://schemas.openxmlformats.org/presentationml/2006/main">
+  <p:cSld>
+    <p:spTree>
+      <p:nvGrpSpPr>
+        <p:cNvPr id="1" name=""/>
+        <p:cNvGrpSpPr/>
+        <p:nvPr/>
+      </p:nvGrpSpPr>
+      <p:grpSpPr>
+        <a:xfrm>
+          <a:off x="0" y="0"/>
+          <a:ext cx="0" cy="0"/>
+          <a:chOff x="0" y="0"/>
+          <a:chExt cx="0" cy="0"/>
+        </a:xfrm>
+      </p:grpSpPr>
+      <p:sp>
+        <p:nvSpPr>
+          <p:cNvPr id="4" name="テキスト ボックス 3">
+            <a:extLst>
+              <a:ext uri="{FF2B5EF4-FFF2-40B4-BE49-F238E27FC236}">
+                <a16:creationId xmlns:a16="http://schemas.microsoft.com/office/drawing/2014/main" id="{5A13BF46-B8C5-48AA-8308-C9ECFF431A18}"/>
+              </a:ext>
+            </a:extLst>
+          </p:cNvPr>
+          <p:cNvSpPr txBox="1"/>
+          <p:nvPr/>
+        </p:nvSpPr>
+        <p:spPr>
+          <a:xfrm>
+            <a:off x="567542" y="491954"/>
+            <a:ext cx="3057247" cy="584775"/>
+          </a:xfrm>
+          <a:prstGeom prst="rect">
+            <a:avLst/>
+          </a:prstGeom>
+          <a:noFill/>
+        </p:spPr>
+        <p:txBody>
+          <a:bodyPr wrap="none" rtlCol="0">
+            <a:spAutoFit/>
+          </a:bodyPr>
+          <a:lstStyle/>
+          <a:p>
+            <a:r>
+              <a:rPr kumimoji="1" lang="ja-JP" altLang="en-US" sz="3200" b="1" u="sng" dirty="0"/>
+              <a:t>リポジトリ作成</a:t>
+            </a:r>
+          </a:p>
+        </p:txBody>
+      </p:sp>
+      <p:sp>
+        <p:nvSpPr>
+          <p:cNvPr id="6" name="テキスト ボックス 5">
+            <a:extLst>
+              <a:ext uri="{FF2B5EF4-FFF2-40B4-BE49-F238E27FC236}">
+                <a16:creationId xmlns:a16="http://schemas.microsoft.com/office/drawing/2014/main" id="{55830AD6-028B-4C4E-80BF-B70DFC1C3A46}"/>
+              </a:ext>
+            </a:extLst>
+          </p:cNvPr>
+          <p:cNvSpPr txBox="1"/>
+          <p:nvPr/>
+        </p:nvSpPr>
+        <p:spPr>
+          <a:xfrm>
+            <a:off x="567542" y="1216429"/>
             <a:ext cx="9493304" cy="830997"/>
           </a:xfrm>
           <a:prstGeom prst="rect">
@@ -4975,7 +5043,7 @@
 </p:sld>
 </file>
 
-<file path=ppt/slides/slide6.xml><?xml version="1.0" encoding="utf-8"?>
+<file path=ppt/slides/slide7.xml><?xml version="1.0" encoding="utf-8"?>
 <p:sld xmlns:a="http://schemas.openxmlformats.org/drawingml/2006/main" xmlns:r="http://schemas.openxmlformats.org/officeDocument/2006/relationships" xmlns:p="http://schemas.openxmlformats.org/presentationml/2006/main">
   <p:cSld>
     <p:spTree>
@@ -5176,7 +5244,7 @@
 </p:sld>
 </file>
 
-<file path=ppt/slides/slide7.xml><?xml version="1.0" encoding="utf-8"?>
+<file path=ppt/slides/slide8.xml><?xml version="1.0" encoding="utf-8"?>
 <p:sld xmlns:a="http://schemas.openxmlformats.org/drawingml/2006/main" xmlns:r="http://schemas.openxmlformats.org/officeDocument/2006/relationships" xmlns:p="http://schemas.openxmlformats.org/presentationml/2006/main">
   <p:cSld>
     <p:spTree>
@@ -5258,7 +5326,7 @@
           <a:p>
             <a:r>
               <a:rPr lang="ja-JP" altLang="en-US" sz="2400" dirty="0"/>
-              <a:t>メンバー全員が</a:t>
+              <a:t>メンバー全員の</a:t>
             </a:r>
             <a:r>
               <a:rPr lang="en-US" altLang="ja-JP" sz="2400" dirty="0"/>
